--- a/docs/選定結果フィードバック_アビームコンサルティング様.pptx
+++ b/docs/選定結果フィードバック_アビームコンサルティング様.pptx
@@ -2792,6 +2792,9 @@
               <a:lnSpc>
                 <a:spcPct val="112000"/>
               </a:lnSpc>
+              <a:spcAft>
+                <a:spcPts val="600"/>
+              </a:spcAft>
               <a:buNone/>
             </a:pPr>
             <a:r>
@@ -2803,7 +2806,47 @@
                 <a:ea typeface="Meiryo" pitchFamily="34" charset="-122"/>
                 <a:cs typeface="Meiryo" pitchFamily="34" charset="-120"/>
               </a:rPr>
-              <a:t>率直に申し上げて、コスト面（見積総額の妥当性・工数単価の透明性）は3社の中で最も低い評価でした。フェーズ別・タスク別の工数内訳と単価の開示をお願いいたします。また、ご提案でオプション扱いとなっている成果物（「攻め」関連の実証等）の基本スコープへの組み入れについて、協議をお願いいたします。</a:t>
+              <a:t>率直に申し上げて、コスト面（見積総額の妥当性・工数単価の透明性）は3社の中で最も低い評価でした。オプション扱いの成果物（「攻め」関連の実証等）の基本スコープ化も含め、協議をお願いいたします。</a:t>
+            </a:r>
+            <a:endParaRPr lang="en-US" sz="980" dirty="0"/>
+          </a:p>
+          <a:p>
+            <a:pPr indent="0" marL="0">
+              <a:lnSpc>
+                <a:spcPct val="112000"/>
+              </a:lnSpc>
+              <a:buNone/>
+            </a:pPr>
+            <a:r>
+              <a:rPr lang="en-US" sz="920" b="1" dirty="0">
+                <a:solidFill>
+                  <a:srgbClr val="1F3864"/>
+                </a:solidFill>
+                <a:latin typeface="Meiryo" pitchFamily="34" charset="0"/>
+                <a:ea typeface="Meiryo" pitchFamily="34" charset="-122"/>
+                <a:cs typeface="Meiryo" pitchFamily="34" charset="-120"/>
+              </a:rPr>
+              <a:t>▶ 改善要素（具体アクション例）</a:t>
+            </a:r>
+            <a:endParaRPr lang="en-US" sz="980" dirty="0"/>
+          </a:p>
+          <a:p>
+            <a:pPr indent="0" marL="0">
+              <a:lnSpc>
+                <a:spcPct val="112000"/>
+              </a:lnSpc>
+              <a:buNone/>
+            </a:pPr>
+            <a:r>
+              <a:rPr lang="en-US" sz="900" dirty="0">
+                <a:solidFill>
+                  <a:srgbClr val="26303B"/>
+                </a:solidFill>
+                <a:latin typeface="Meiryo" pitchFamily="34" charset="0"/>
+                <a:ea typeface="Meiryo" pitchFamily="34" charset="-122"/>
+                <a:cs typeface="Meiryo" pitchFamily="34" charset="-120"/>
+              </a:rPr>
+              <a:t>フェーズ×タスク別の工数内訳表・ランク別単価表・オプション別内訳の開示。基本／オプションの線引き根拠のご説明。</a:t>
             </a:r>
             <a:endParaRPr lang="en-US" sz="980" dirty="0"/>
           </a:p>
@@ -2946,6 +2989,9 @@
               <a:lnSpc>
                 <a:spcPct val="112000"/>
               </a:lnSpc>
+              <a:spcAft>
+                <a:spcPts val="600"/>
+              </a:spcAft>
               <a:buNone/>
             </a:pPr>
             <a:r>
@@ -2957,7 +3003,47 @@
                 <a:ea typeface="Meiryo" pitchFamily="34" charset="-122"/>
                 <a:cs typeface="Meiryo" pitchFamily="34" charset="-120"/>
               </a:rPr>
-              <a:t>各工程の成果物の完遂責任と検収基準を、契約上明確にさせていただきたく存じます。弊社は要求定義〜ベンダー選定を複数の工程に分割し、工程ごとにゲート審査（Go/No-Go）を設ける段階発注を予定しております。工程単位での成果物確約をお願いいたします。</a:t>
+              <a:t>弊社は要求定義〜ベンダー選定を複数の工程に分割し、工程ごとにゲート審査（Go/No-Go）を設ける段階発注を予定しております。工程単位での成果物の完遂確約をお願いいたします。</a:t>
+            </a:r>
+            <a:endParaRPr lang="en-US" sz="980" dirty="0"/>
+          </a:p>
+          <a:p>
+            <a:pPr indent="0" marL="0">
+              <a:lnSpc>
+                <a:spcPct val="112000"/>
+              </a:lnSpc>
+              <a:buNone/>
+            </a:pPr>
+            <a:r>
+              <a:rPr lang="en-US" sz="920" b="1" dirty="0">
+                <a:solidFill>
+                  <a:srgbClr val="1F3864"/>
+                </a:solidFill>
+                <a:latin typeface="Meiryo" pitchFamily="34" charset="0"/>
+                <a:ea typeface="Meiryo" pitchFamily="34" charset="-122"/>
+                <a:cs typeface="Meiryo" pitchFamily="34" charset="-120"/>
+              </a:rPr>
+              <a:t>▶ 改善要素（具体アクション例）</a:t>
+            </a:r>
+            <a:endParaRPr lang="en-US" sz="980" dirty="0"/>
+          </a:p>
+          <a:p>
+            <a:pPr indent="0" marL="0">
+              <a:lnSpc>
+                <a:spcPct val="112000"/>
+              </a:lnSpc>
+              <a:buNone/>
+            </a:pPr>
+            <a:r>
+              <a:rPr lang="en-US" sz="900" dirty="0">
+                <a:solidFill>
+                  <a:srgbClr val="26303B"/>
+                </a:solidFill>
+                <a:latin typeface="Meiryo" pitchFamily="34" charset="0"/>
+                <a:ea typeface="Meiryo" pitchFamily="34" charset="-122"/>
+                <a:cs typeface="Meiryo" pitchFamily="34" charset="-120"/>
+              </a:rPr>
+              <a:t>工程別の成果物一覧・検収基準書のご提示と、完遂責任・再作業条件の契約条項への明記。</a:t>
             </a:r>
             <a:endParaRPr lang="en-US" sz="980" dirty="0"/>
           </a:p>
@@ -3100,6 +3186,9 @@
               <a:lnSpc>
                 <a:spcPct val="112000"/>
               </a:lnSpc>
+              <a:spcAft>
+                <a:spcPts val="600"/>
+              </a:spcAft>
               <a:buNone/>
             </a:pPr>
             <a:r>
@@ -3111,7 +3200,47 @@
                 <a:ea typeface="Meiryo" pitchFamily="34" charset="-122"/>
                 <a:cs typeface="Meiryo" pitchFamily="34" charset="-120"/>
               </a:rPr>
-              <a:t>ご提示いただいた主要メンバーの稼働率（アサイン比率）の明示と、工程をまたぐ体制の継続性（キーパーソンの交代制限・交代時の事前協議）の確約をお願いいたします。ご提案の品質を実行体制で担保いただくことが、弊社の期待の中心にあります。</a:t>
+              <a:t>ご提案の品質を実行体制で担保いただくことが弊社の期待の中心です。主要メンバーの稼働率の明示と、工程をまたぐ体制の継続性の確約をお願いいたします。</a:t>
+            </a:r>
+            <a:endParaRPr lang="en-US" sz="980" dirty="0"/>
+          </a:p>
+          <a:p>
+            <a:pPr indent="0" marL="0">
+              <a:lnSpc>
+                <a:spcPct val="112000"/>
+              </a:lnSpc>
+              <a:buNone/>
+            </a:pPr>
+            <a:r>
+              <a:rPr lang="en-US" sz="920" b="1" dirty="0">
+                <a:solidFill>
+                  <a:srgbClr val="1F3864"/>
+                </a:solidFill>
+                <a:latin typeface="Meiryo" pitchFamily="34" charset="0"/>
+                <a:ea typeface="Meiryo" pitchFamily="34" charset="-122"/>
+                <a:cs typeface="Meiryo" pitchFamily="34" charset="-120"/>
+              </a:rPr>
+              <a:t>▶ 改善要素（具体アクション例）</a:t>
+            </a:r>
+            <a:endParaRPr lang="en-US" sz="980" dirty="0"/>
+          </a:p>
+          <a:p>
+            <a:pPr indent="0" marL="0">
+              <a:lnSpc>
+                <a:spcPct val="112000"/>
+              </a:lnSpc>
+              <a:buNone/>
+            </a:pPr>
+            <a:r>
+              <a:rPr lang="en-US" sz="900" dirty="0">
+                <a:solidFill>
+                  <a:srgbClr val="26303B"/>
+                </a:solidFill>
+                <a:latin typeface="Meiryo" pitchFamily="34" charset="0"/>
+                <a:ea typeface="Meiryo" pitchFamily="34" charset="-122"/>
+                <a:cs typeface="Meiryo" pitchFamily="34" charset="-120"/>
+              </a:rPr>
+              <a:t>主要メンバーの稼働率（アサイン比率）表のご提示。キーパーソンの交代制限・交代時の事前協議条項の契約反映。</a:t>
             </a:r>
             <a:endParaRPr lang="en-US" sz="980" dirty="0"/>
           </a:p>
